--- a/apps/resources/bundled_files/6-klass-tuz-teskeri-proporciya-sabak.pptx
+++ b/apps/resources/bundled_files/6-klass-tuz-teskeri-proporciya-sabak.pptx
@@ -5196,7 +5196,7 @@
                 </a:solidFill>
                 <a:latin typeface="PT Sans"/>
               </a:rPr>
-              <a:t>6-класс · Математика</a:t>
+              <a:t/>
             </a:r>
           </a:p>
         </p:txBody>
@@ -5688,7 +5688,7 @@
                 </a:solidFill>
                 <a:latin typeface="PT Sans"/>
               </a:rPr>
-              <a:t>6-класс ›</a:t>
+              <a:t/>
             </a:r>
           </a:p>
           <a:p>
@@ -6637,7 +6637,7 @@
                 </a:solidFill>
                 <a:latin typeface="PT Sans"/>
               </a:rPr>
-              <a:t>6-класс ›</a:t>
+              <a:t/>
             </a:r>
           </a:p>
           <a:p>
@@ -12114,7 +12114,7 @@
                 </a:solidFill>
                 <a:latin typeface="PT Sans"/>
               </a:rPr>
-              <a:t>6-класс ›</a:t>
+              <a:t/>
             </a:r>
           </a:p>
           <a:p>
@@ -14880,7 +14880,7 @@
                 </a:solidFill>
                 <a:latin typeface="PT Sans"/>
               </a:rPr>
-              <a:t>6-класс ›</a:t>
+              <a:t/>
             </a:r>
           </a:p>
           <a:p>
@@ -16463,7 +16463,7 @@
                 </a:solidFill>
                 <a:latin typeface="PT Sans"/>
               </a:rPr>
-              <a:t>6-класс ›</a:t>
+              <a:t/>
             </a:r>
           </a:p>
           <a:p>
@@ -17292,7 +17292,7 @@
                 </a:solidFill>
                 <a:latin typeface="PT Sans"/>
               </a:rPr>
-              <a:t>6-класс ›</a:t>
+              <a:t/>
             </a:r>
           </a:p>
           <a:p>
@@ -18121,7 +18121,7 @@
                 </a:solidFill>
                 <a:latin typeface="PT Sans"/>
               </a:rPr>
-              <a:t>6-класс ›</a:t>
+              <a:t/>
             </a:r>
           </a:p>
           <a:p>
@@ -19787,7 +19787,7 @@
                 </a:solidFill>
                 <a:latin typeface="PT Sans"/>
               </a:rPr>
-              <a:t>6-класс ›</a:t>
+              <a:t/>
             </a:r>
           </a:p>
           <a:p>
@@ -20871,7 +20871,7 @@
                 </a:solidFill>
                 <a:latin typeface="PT Sans"/>
               </a:rPr>
-              <a:t>6-класс ›</a:t>
+              <a:t/>
             </a:r>
           </a:p>
           <a:p>
@@ -22401,7 +22401,7 @@
                 </a:solidFill>
                 <a:latin typeface="PT Sans"/>
               </a:rPr>
-              <a:t>6-класс ›</a:t>
+              <a:t/>
             </a:r>
           </a:p>
           <a:p>
@@ -25238,7 +25238,7 @@
                 </a:solidFill>
                 <a:latin typeface="PT Sans"/>
               </a:rPr>
-              <a:t>6-класс ›</a:t>
+              <a:t/>
             </a:r>
           </a:p>
           <a:p>
@@ -26515,7 +26515,7 @@
                 </a:solidFill>
                 <a:latin typeface="PT Sans"/>
               </a:rPr>
-              <a:t>6-класс ›</a:t>
+              <a:t/>
             </a:r>
           </a:p>
           <a:p>
@@ -27943,7 +27943,7 @@
                 </a:solidFill>
                 <a:latin typeface="PT Sans"/>
               </a:rPr>
-              <a:t>6-класс ›</a:t>
+              <a:t/>
             </a:r>
           </a:p>
           <a:p>
@@ -29399,7 +29399,7 @@
                 </a:solidFill>
                 <a:latin typeface="PT Sans"/>
               </a:rPr>
-              <a:t>6-класс ›</a:t>
+              <a:t/>
             </a:r>
           </a:p>
           <a:p>
@@ -31026,7 +31026,7 @@
                 </a:solidFill>
                 <a:latin typeface="PT Sans"/>
               </a:rPr>
-              <a:t>6-класс ›</a:t>
+              <a:t/>
             </a:r>
           </a:p>
           <a:p>
@@ -31826,7 +31826,7 @@
                 </a:solidFill>
                 <a:latin typeface="PT Sans"/>
               </a:rPr>
-              <a:t>6-класс ›</a:t>
+              <a:t/>
             </a:r>
           </a:p>
           <a:p>
@@ -32667,7 +32667,7 @@
                 </a:solidFill>
                 <a:latin typeface="PT Sans"/>
               </a:rPr>
-              <a:t>6-класс ›</a:t>
+              <a:t/>
             </a:r>
           </a:p>
           <a:p>
@@ -33616,7 +33616,7 @@
                 </a:solidFill>
                 <a:latin typeface="PT Sans"/>
               </a:rPr>
-              <a:t>6-класс ›</a:t>
+              <a:t/>
             </a:r>
           </a:p>
           <a:p>
@@ -35070,7 +35070,7 @@
                 </a:solidFill>
                 <a:latin typeface="PT Sans"/>
               </a:rPr>
-              <a:t>6-класс ›</a:t>
+              <a:t/>
             </a:r>
           </a:p>
           <a:p>
@@ -35816,7 +35816,7 @@
                 </a:solidFill>
                 <a:latin typeface="PT Sans"/>
               </a:rPr>
-              <a:t>6-класс ›</a:t>
+              <a:t/>
             </a:r>
           </a:p>
           <a:p>
@@ -36624,7 +36624,7 @@
                 </a:solidFill>
                 <a:latin typeface="PT Sans"/>
               </a:rPr>
-              <a:t>6-класс ›</a:t>
+              <a:t/>
             </a:r>
           </a:p>
           <a:p>
@@ -37815,7 +37815,7 @@
                 </a:solidFill>
                 <a:latin typeface="PT Sans"/>
               </a:rPr>
-              <a:t>6-класс ›</a:t>
+              <a:t/>
             </a:r>
           </a:p>
           <a:p>
@@ -39010,7 +39010,7 @@
                 </a:solidFill>
                 <a:latin typeface="PT Sans"/>
               </a:rPr>
-              <a:t>6-класс ›</a:t>
+              <a:t/>
             </a:r>
           </a:p>
           <a:p>
@@ -39191,7 +39191,7 @@
                 </a:solidFill>
                 <a:latin typeface="PT Sans"/>
               </a:rPr>
-              <a:t>4–5-класс</a:t>
+              <a:t/>
             </a:r>
           </a:p>
         </p:txBody>
@@ -39371,7 +39371,7 @@
                 </a:solidFill>
                 <a:latin typeface="PT Sans"/>
               </a:rPr>
-              <a:t>6-класс</a:t>
+              <a:t/>
             </a:r>
           </a:p>
         </p:txBody>
@@ -39551,7 +39551,7 @@
                 </a:solidFill>
                 <a:latin typeface="PT Sans"/>
               </a:rPr>
-              <a:t>6-класс</a:t>
+              <a:t/>
             </a:r>
           </a:p>
         </p:txBody>
@@ -39787,7 +39787,7 @@
                 </a:solidFill>
                 <a:latin typeface="PT Sans"/>
               </a:rPr>
-              <a:t>7-класс</a:t>
+              <a:t/>
             </a:r>
           </a:p>
         </p:txBody>
@@ -40207,7 +40207,7 @@
                 </a:solidFill>
                 <a:latin typeface="PT Sans"/>
               </a:rPr>
-              <a:t>6-класс ›</a:t>
+              <a:t/>
             </a:r>
           </a:p>
           <a:p>
@@ -41355,7 +41355,7 @@
                 </a:solidFill>
                 <a:latin typeface="PT Sans"/>
               </a:rPr>
-              <a:t>6-класс ›</a:t>
+              <a:t/>
             </a:r>
           </a:p>
           <a:p>

--- a/apps/resources/bundled_files/6-klass-tuz-teskeri-proporciya-sabak.pptx
+++ b/apps/resources/bundled_files/6-klass-tuz-teskeri-proporciya-sabak.pptx
@@ -667,7 +667,7 @@
           <a:lstStyle/>
           <a:p>
             <a:r>
-              <a:t>Түз пропорция: x бир нече эсе чоңойсо, y да ошончо эсе чоңоет, y ÷ x туруктуу. Тескери пропорция: x бир нече эсе чоңойсо, y ошончо эсе кичирейет, x × y туруктуу. Экөө тең болбосо – эч кайсысы (такси, суу бочкасы). Ката коддору: М1 (тескерини түз деп алуу), М2 (кошуу), М4/М5 (ажыратуу).</a:t>
+              <a:t>Түз пропорция: x бир нече эсе чоңойсо, y да ошончо эсе чоңоёт, y ÷ x туруктуу. Тескери пропорция: x бир нече эсе чоңойсо, y ошончо эсе кичирейет, x × y туруктуу. Экөө тең болбосо – эч кайсысы (такси, суу бочкасы). Ката коддору: М1 (тескерини түз деп алуу), М2 (кошуу), М4/М5 (ажыратуу).</a:t>
             </a:r>
           </a:p>
         </p:txBody>
@@ -1582,7 +1582,7 @@
           <a:lstStyle/>
           <a:p>
             <a:r>
-              <a:t>Ой жүгүртүү маданияты (Wenxi Lee, 2.6).</a:t>
+              <a:t>Ой жүгүртүү маданияты (Wenxi Lee, 2,6).</a:t>
             </a:r>
           </a:p>
         </p:txBody>
